--- a/dist/weeks-대학원/컨셉트와프로세스_07주차_프로포절의뼈대.pptx
+++ b/dist/weeks-대학원/컨셉트와프로세스_07주차_프로포절의뼈대.pptx
@@ -615,9 +615,11 @@
 여기서 10분 동안 직접 쓰시겠습니다.
 한 문단입니다. 다음 회차 프로포절에 그대로 들어갈 문단이에요.
 먼저 2분. 내 연구가 따르는 절차를 한 줄로 적으세요. 더블 다이아몬드든, 자기가 짠 것이든, 아직 없든. 없으면 없다고 적으시면 됩니다.
-다음 3분. 오늘 본 비판 네 줄 중에 내 연구에 걸리는 게 무엇인지 고르세요. 순서, 문제와 해결, 끝나는 지점, 누가 하는가. 하나나 둘이면 됩니다.
+다음 3분. 아까 본 전제 네 가지 중에 내 문제에 안 맞는 게 무엇인지 고르세요. 순서, 문제와 해결, 끝나는 지점, 누가 하는가. 하나나 둘이면 됩니다.
+네 가지가 다 맞는다고 생각되시면 다시 보세요. 대개 하나는 안 맞습니다.
 그다음 3분. 그래서 내 연구는 그 자리를 어떻게 다루는지 적으세요. 그냥 '한계로 인정한다'도 답입니다. 다만 인정했다고 적어야 합니다.
-마지막 2분. 네 문장으로 이어 붙이세요. 내 절차는 무엇이고, 그 절차의 어디가 약하고, 나는 그걸 어떻게 다루고, 그래서 이 연구에서 그 선택이 왜 정당한가.
+마지막 2분. 네 문장으로 이어 붙이세요. 내 절차는 무엇이고, 그중 어떤 전제가 내 문제에 안 맞고, 나는 그걸 어떻게 다루고, 그래서 이 연구에서 그 선택이 왜 정당한가.
+이 네 문장이 입장입니다. 아까 말씀드린 그거예요.
 이 네 문장이 프로포절의 연구 방법 절 앞에 들어갑니다. 심사에서 '왜 이 절차입니까'를 물으면 이 문단을 읽으시면 됩니다.
 [운영 메모]
 PART 2 안에 넣어 배운 직후 바로 쓰게 했다. 10분 안에 끝낸다. 완성이 목적이 아니라 뼈대를 잡는 것이다. 다 못 쓴 학생은 과제로 넘기되 네 문장 틀은 적어 가게 할 것.</a:t>
@@ -1011,11 +1013,15 @@
               <a:rPr lang="en-US" dirty="0"/>
               <a:t>[말할 내용]
 먼저 절차 이야기입니다.
-마름모 두 개짜리 그림 있지요. 발산하고 수렴하고 또 발산하고 수렴하는.
-그 그림을 논문 3장에 그려 넣으시는 순간, 사실은 연구에 대한 입장 하나를 택하신 겁니다. 본인은 그냥 그림을 빌려 왔다고 생각하시지만요.
-어디서 왔고 무엇을 빌려 오는 건지부터 보겠습니다.
+말을 하나 정하고 가겠습니다. 오늘 전제라는 말을 자주 쓸 텐데, 뜻을 먼저 맞춰 두죠.
+전제는 내가 고르지 않았는데 따라 들어온 것을 말합니다.
+예를 들어 더블 다이아몬드를 그리시면 이런 것들이 같이 들어옵니다. 문제는 해결보다 먼저 정해진다. 과정은 넓혔다 좁히는 리듬으로 간다. 전달하면 끝난다. 그리고 과정을 이끄는 주체가 하나다.
+이걸 택하신 적 없으시죠. 그림만 가져오셨는데 네 가지가 따라온 겁니다. 그게 전제입니다.
+그리고 하나 더. 입장은 그 전제에 대해 내가 밝히는 태도입니다. 그대로 따르겠다, 고쳐 쓰겠다, 안 맞는 걸 알지만 한계로 인정하겠다. 셋 다 답이 됩니다. 밝히지 않는 것만 답이 아니에요.
+그러니까 오늘 앞부분은 이 한 문장입니다. 절차에는 전제가 들어 있고, 연구자는 그 전제에 대해 입장을 밝혀야 한다.
+자, 그 그림이 어디서 왔고 무엇을 데려오는 건지 보겠습니다.
 [운영 메모]
-30분 구간. 이 파트는 그 자체가 목적이 아니라 PART 2 로 넘어가기 위한 준비다. '절차를 고르는 일이 곧 입장을 고르는 일'까지만 가면 된다. 비판을 깊이 끌고 가지 말 것.</a:t>
+30분 구간. 전제와 입장을 첫 2분 안에 갈라 둘 것 — 두 말이 섞이면 뒤가 전부 흐려진다. 전제는 고르지 않았는데 따라온 것, 입장은 그에 대해 내가 밝히는 태도다. 이 파트는 그 자체가 목적이 아니라 PART 2 로 넘어가기 위한 준비이므로 비판을 깊이 끌고 가지 말 것.</a:t>
             </a:r>
             <a:endParaRPr lang="en-US" dirty="0"/>
           </a:p>
@@ -1206,14 +1212,15 @@
               <a:rPr lang="en-US" dirty="0"/>
               <a:t>[말할 내용]
 한 문장으로 정리하면 이겁니다.
-도식은 설명이지 방법이 아닙니다.
-설명을 방법으로 바꿔 쓰면 어떻게 되느냐. 연구가 도식을 따라가게 됩니다.
+도식을 빌려 오면 고른 적 없는 전제가 따라옵니다.
+그 전제를 모르고 쓰면 어떻게 되느냐. 연구가 도식을 따라가게 됩니다.
 여러분 논문에서 자주 보이는 모습이 있어요. 3장 제목이 '디스커버', 4장이 '디파인', 5장이 '디벨롭'. 그리고 각 장에 뭘 채울지를 도식을 보며 정합니다.
 그러면 순서가 뒤집힌 겁니다. 연구 질문이 방법을 정해야 하는데, 도식이 방법을 정하고 질문이 거기 맞춰지는 거죠.
-도식을 쓰지 말라는 게 아닙니다. 쓰시되, 내 연구 질문이 먼저 있고 그걸 설명하려고 도식을 빌려 쓴다는 순서를 지키시라는 겁니다.
-심사에서 물어봅니다. 왜 이 절차를 택했습니까. '더블 다이아몬드라서'는 답이 아닙니다.
+도식을 쓰지 말라는 게 아닙니다. 따라온 전제가 무엇인지 아시고, 그게 내 문제에 맞는지 따져 보시고, 안 맞으면 어떻게 다룰지 밝히시라는 겁니다.
+그 밝힌 것을 오늘 입장이라고 부르겠습니다. 이따 한 문단으로 쓰실 겁니다.
+심사에서 물어봅니다. 왜 이 절차를 택했습니까. '더블 다이아몬드라서'는 답이 아닙니다. '제 문제가 이런 성질이라 이 절차의 이 부분은 맞고 이 부분은 안 맞는데 이렇게 다뤘습니다'가 답입니다.
 [운영 메모]
-심사 질문('왜 이 절차를 택했습니까')으로 연결하면 학생들이 진지해진다. 이 장표가 오늘 강의의 축이다.</a:t>
+전제와 입장을 가르는 장표다. 여기서 '입장'의 뜻을 못 박아 두어야 워크숍과 과제가 굴러간다. 심사 질문으로 연결하면 학생들이 진지해진다.</a:t>
             </a:r>
             <a:endParaRPr lang="en-US" dirty="0"/>
           </a:p>
@@ -1302,14 +1309,17 @@
             <a:r>
               <a:rPr lang="en-US" dirty="0"/>
               <a:t>[말할 내용]
-비판을 네 줄로 정리했습니다. 왼쪽이 도식이 말하는 것, 오른쪽이 실제 연구가 보여 준 것입니다.
+아까 말씀드린 전제 네 가지가 이겁니다. 왼쪽이 도식이 전제하는 것, 오른쪽이 실제 과정을 관찰한 연구가 보고한 것입니다.
 첫 줄, 순서. 도식은 네 단계를 차례로 지난다고 말합니다. 그런데 실제 과정을 관찰한 연구들은 앞뒤로 계속 오간다고 보고합니다. 디벨롭하다가 문제 정의로 돌아가는 일이 정상이에요.
-둘째 줄, 문제와 해결. 도식은 앞 마름모에서 문제를 정하고 뒤에서 푼다고 합니다. 그런데 5회차와 6회차에 보신 것처럼, 문제와 해결은 함께 움직입니다. 해결안을 그려 봐야 문제가 무엇이었는지 알게 되죠. 리텔의 wicked problem 이야기와 같은 자리입니다.
+둘째 줄이 제일 큽니다. 문제와 해결이요. 도식은 앞 마름모에서 문제를 정하고 뒤에서 푼다고 합니다.
+여기에 숨은 전제가 하나 있어요. 이 문제가 정의할 수 있는 종류의 문제라는 겁니다. 4회차에 하신 말로 하면 tame 하다는 거죠.
+그런데 여러분 연구 문제가 wicked 하다면요. 해결안을 그려 봐야 문제가 무엇이었는지 알게 되는 종류라면, 앞 마름모에서 문제를 다 정하고 넘어간다는 전제가 애초에 안 맞습니다.
+그러면 도식을 쓰시면 안 되느냐. 쓰셔도 됩니다. 다만 그 전제가 내 문제에 안 맞는다는 걸 아시고, 그걸 어떻게 다룰지를 적으셔야 합니다. 그게 입장이에요.
 셋째 줄, 끝나는 지점. 도식은 전달하면 끝이라고 그려 놓습니다. 실제로는 전달한 뒤가 시작이에요. 쓰이면서 바뀌고, 쓰는 사람이 다시 만듭니다.
 넷째 줄, 누가 하는가. 도식에는 사람이 안 보입니다. 디자이너 한 명이 네 단계를 지나는 것처럼 보이죠. 실제로는 여러 이해관계자가 얽혀 있고, 누가 결정권을 갖느냐가 결과를 가릅니다. 이게 다음 파트의 참여디자인 이야기로 이어집니다.
 정리하면, 도식은 깨끗하고 과정은 지저분합니다. 지저분한 걸 그대로 쓰시라는 게 아니라, 깨끗한 그림을 그려 놓고 지저분한 걸 숨기지 마시라는 겁니다.
 [운영 메모]
-둘째 줄은 5~6회차(wicked problem · co-evolution)와 직접 이어진다. 넷째 줄은 PART 2 의 참여디자인으로 넘기는 다리다.</a:t>
+둘째 줄에 시간을 쓸 것. 4회차 wicked problem 과 직접 이어진다 — 더블 다이아몬드는 문제가 tame 하다고 전제한다. 학생의 연구 문제가 wicked 한데 이 도식을 쓰면 그 자리에서 어긋나는데, 대개 모르고 쓴다. 워크숍 2단계가 바로 이 표에서 하나를 고르는 일이다.</a:t>
             </a:r>
             <a:endParaRPr lang="en-US" dirty="0"/>
           </a:p>
@@ -2447,7 +2457,7 @@
                 <a:ea typeface="Pretendard Light" pitchFamily="34" charset="-122"/>
                 <a:cs typeface="Pretendard Light" pitchFamily="34" charset="-120"/>
               </a:rPr>
-              <a:t>내가 쓰는 절차에 어떤 입장이 들어 있는지 보고,</a:t>
+              <a:t>내가 쓰는 절차에 어떤 전제가 따라오는지 보고,</a:t>
             </a:r>
             <a:endParaRPr lang="en-US" sz="1600" dirty="0"/>
           </a:p>
@@ -3003,7 +3013,7 @@
                 <a:ea typeface="Pretendard" pitchFamily="34" charset="-122"/>
                 <a:cs typeface="Pretendard" pitchFamily="34" charset="-120"/>
               </a:rPr>
-              <a:t>다음 회차 프로포절에 그대로 들어갈 한 문단입니다.</a:t>
+              <a:t>이 한 문단을 입장이라고 부릅니다. 다음 회차 프로포절에 그대로 들어갑니다.</a:t>
             </a:r>
             <a:endParaRPr lang="en-US" sz="1150" dirty="0"/>
           </a:p>
@@ -3173,7 +3183,7 @@
                 <a:ea typeface="Pretendard SemiBold" pitchFamily="34" charset="-122"/>
                 <a:cs typeface="Pretendard SemiBold" pitchFamily="34" charset="-120"/>
               </a:rPr>
-              <a:t>비판 네 줄 중 걸리는 것을 고른다</a:t>
+              <a:t>전제 네 가지 중 내 문제에 안 맞는 것을 고른다</a:t>
             </a:r>
             <a:endParaRPr lang="en-US" sz="1450" dirty="0"/>
           </a:p>
@@ -3385,7 +3395,7 @@
                 <a:ea typeface="Pretendard SemiBold" pitchFamily="34" charset="-122"/>
                 <a:cs typeface="Pretendard SemiBold" pitchFamily="34" charset="-120"/>
               </a:rPr>
-              <a:t>네 문장으로 이어 붙인다</a:t>
+              <a:t>네 문장으로 이어 붙인다 — 이것이 입장이다</a:t>
             </a:r>
             <a:endParaRPr lang="en-US" sz="1450" dirty="0"/>
           </a:p>
@@ -3427,7 +3437,7 @@
                 <a:ea typeface="Pretendard" pitchFamily="34" charset="-122"/>
                 <a:cs typeface="Pretendard" pitchFamily="34" charset="-120"/>
               </a:rPr>
-              <a:t>내 절차 · 그 절차의 약한 곳 · 내가 다루는 방식 · 그 선택이 정당한 이유.</a:t>
+              <a:t>내 절차 · 안 맞는 전제 · 내가 그것을 다루는 방식 · 그 선택이 정당한 이유.</a:t>
             </a:r>
             <a:endParaRPr lang="en-US" sz="1150" dirty="0"/>
           </a:p>
@@ -5998,7 +6008,7 @@
                 <a:ea typeface="Pretendard" pitchFamily="34" charset="-122"/>
                 <a:cs typeface="Pretendard" pitchFamily="34" charset="-120"/>
               </a:rPr>
-              <a:t>오늘 쓴 입장 한 문단이 연구 방법 절 앞에 들어 있다</a:t>
+              <a:t>내 절차의 전제 중 무엇이 문제에 안 맞는지, 그것을 어떻게 다루는지가 적혀 있다</a:t>
             </a:r>
             <a:endParaRPr lang="en-US" sz="1050" dirty="0"/>
           </a:p>
@@ -7308,7 +7318,7 @@
                 <a:ea typeface="Pretendard" pitchFamily="34" charset="-122"/>
                 <a:cs typeface="Pretendard" pitchFamily="34" charset="-120"/>
               </a:rPr>
-              <a:t>수업에서 쓴 네 문장을 다듬습니다. 내 절차 · 그 절차의 약한 곳 · 내가 다루는 방식 · 그 선택이 정당한 이유. 프로포절의 연구 방법 절 앞에 들어갑니다.</a:t>
+              <a:t>수업에서 쓴 네 문장을 다듬습니다. 내 절차 · 그중 내 문제에 안 맞는 전제 · 내가 그것을 다루는 방식 · 그 선택이 정당한 이유. 프로포절의 연구 방법 절 앞에 들어갑니다.</a:t>
             </a:r>
             <a:endParaRPr lang="en-US" sz="1100" dirty="0"/>
           </a:p>
@@ -8569,7 +8579,7 @@
                 <a:ea typeface="Pretendard SemiBold" pitchFamily="34" charset="-122"/>
                 <a:cs typeface="Pretendard SemiBold" pitchFamily="34" charset="-120"/>
               </a:rPr>
-              <a:t>절차에는 입장이 들어 있다</a:t>
+              <a:t>절차에는 전제가 들어 있다</a:t>
             </a:r>
             <a:endParaRPr lang="en-US" sz="4600" dirty="0"/>
           </a:p>
@@ -10240,7 +10250,7 @@
                 <a:ea typeface="Pretendard SemiBold" pitchFamily="34" charset="-122"/>
                 <a:cs typeface="Pretendard SemiBold" pitchFamily="34" charset="-120"/>
               </a:rPr>
-              <a:t>도식은 설명이지 방법이 아닙니다.</a:t>
+              <a:t>도식을 빌려 오면</a:t>
             </a:r>
             <a:endParaRPr lang="en-US" sz="3400" dirty="0"/>
           </a:p>
@@ -10260,7 +10270,7 @@
                 <a:ea typeface="Pretendard SemiBold" pitchFamily="34" charset="-122"/>
                 <a:cs typeface="Pretendard SemiBold" pitchFamily="34" charset="-120"/>
               </a:rPr>
-              <a:t>설명을 방법으로 쓰면 연구가 도식을 따라가게 됩니다.</a:t>
+              <a:t>고른 적 없는 전제가 따라옵니다.</a:t>
             </a:r>
             <a:endParaRPr lang="en-US" sz="3400" dirty="0"/>
           </a:p>
@@ -10302,7 +10312,7 @@
                 <a:ea typeface="Pretendard Light" pitchFamily="34" charset="-122"/>
                 <a:cs typeface="Pretendard Light" pitchFamily="34" charset="-120"/>
               </a:rPr>
-              <a:t>논문 3장이 '디스커버', 4장이 '디파인'이 되고, 각 장에 무엇을 채울지를 도식을 보며 정하는 순간 순서가 뒤집힙니다. 연구 질문이 방법을 정해야 하는데 도식이 방법을 정하고 질문이 거기 맞춰집니다. 도식을 쓰지 말라는 것이 아니라, 질문이 먼저 있고 그것을 설명하려고 도식을 빌려 쓴다는 순서를 지키라는 뜻입니다.</a:t>
+              <a:t>논문 3장이 '디스커버', 4장이 '디파인'이 되고 각 장에 무엇을 채울지를 도식을 보며 정하는 순간, 질문이 방법을 정하는 것이 아니라 도식이 방법을 정하고 질문이 거기 맞춰집니다. 도식을 쓰지 말라는 것이 아닙니다. 따라온 전제가 무엇인지 알고, 그것이 내 문제에 맞는지 따지고, 맞지 않으면 어떻게 다룰지 밝히라는 것입니다. 그 밝힌 것을 입장이라고 부르겠습니다.</a:t>
             </a:r>
             <a:endParaRPr lang="en-US" sz="1400" dirty="0"/>
           </a:p>
@@ -10554,7 +10564,7 @@
                 <a:ea typeface="Pretendard" pitchFamily="34" charset="-122"/>
                 <a:cs typeface="Pretendard" pitchFamily="34" charset="-120"/>
               </a:rPr>
-              <a:t>CRITIQUE</a:t>
+              <a:t>PREMISE</a:t>
             </a:r>
             <a:endParaRPr lang="en-US" sz="950" dirty="0"/>
           </a:p>
@@ -10593,7 +10603,7 @@
                 <a:ea typeface="Pretendard SemiBold" pitchFamily="34" charset="-122"/>
                 <a:cs typeface="Pretendard SemiBold" pitchFamily="34" charset="-120"/>
               </a:rPr>
-              <a:t>도식이 말하는 것과 연구가 보여 준 것</a:t>
+              <a:t>도식이 전제하는 것과 연구가 보여 준 것</a:t>
             </a:r>
             <a:endParaRPr lang="en-US" sz="3000" dirty="0"/>
           </a:p>
@@ -10632,7 +10642,7 @@
                 <a:ea typeface="Pretendard" pitchFamily="34" charset="-122"/>
                 <a:cs typeface="Pretendard" pitchFamily="34" charset="-120"/>
               </a:rPr>
-              <a:t>도식은 깨끗하고 과정은 지저분합니다.</a:t>
+              <a:t>네 가지입니다. 고른 적 없는데 도식을 그리면 따라 들어옵니다.</a:t>
             </a:r>
             <a:endParaRPr lang="en-US" sz="1150" dirty="0"/>
           </a:p>
@@ -10647,7 +10657,7 @@
         <p:spPr>
           <a:xfrm>
             <a:off x="640080" y="1627632"/>
-            <a:ext cx="5254600" cy="3419856"/>
+            <a:ext cx="5254600" cy="3127248"/>
           </a:xfrm>
           <a:prstGeom prst="rect">
             <a:avLst/>
@@ -10696,7 +10706,7 @@
                 <a:ea typeface="Pretendard SemiBold" pitchFamily="34" charset="-122"/>
                 <a:cs typeface="Pretendard SemiBold" pitchFamily="34" charset="-120"/>
               </a:rPr>
-              <a:t>도식이 말하는 것</a:t>
+              <a:t>도식이 전제하는 것</a:t>
             </a:r>
             <a:endParaRPr lang="en-US" sz="1700" dirty="0"/>
           </a:p>
@@ -10711,7 +10721,7 @@
         <p:spPr>
           <a:xfrm>
             <a:off x="6297016" y="1627632"/>
-            <a:ext cx="5254600" cy="3419856"/>
+            <a:ext cx="5254600" cy="3127248"/>
           </a:xfrm>
           <a:prstGeom prst="rect">
             <a:avLst/>
@@ -10814,7 +10824,7 @@
         <p:spPr>
           <a:xfrm>
             <a:off x="1042416" y="2688336"/>
-            <a:ext cx="4449928" cy="384048"/>
+            <a:ext cx="4449928" cy="329184"/>
           </a:xfrm>
           <a:prstGeom prst="rect">
             <a:avLst/>
@@ -10895,7 +10905,7 @@
         <p:spPr>
           <a:xfrm>
             <a:off x="6699352" y="2688336"/>
-            <a:ext cx="4449928" cy="384048"/>
+            <a:ext cx="4449928" cy="329184"/>
           </a:xfrm>
           <a:prstGeom prst="rect">
             <a:avLst/>
@@ -10936,7 +10946,7 @@
         </p:nvSpPr>
         <p:spPr>
           <a:xfrm>
-            <a:off x="1042416" y="3054096"/>
+            <a:off x="1042416" y="2980944"/>
             <a:ext cx="4449928" cy="7315"/>
           </a:xfrm>
           <a:prstGeom prst="rect">
@@ -10961,7 +10971,7 @@
         </p:nvSpPr>
         <p:spPr>
           <a:xfrm>
-            <a:off x="6699352" y="3054096"/>
+            <a:off x="6699352" y="2980944"/>
             <a:ext cx="4449928" cy="7315"/>
           </a:xfrm>
           <a:prstGeom prst="rect">
@@ -10986,7 +10996,7 @@
         </p:nvSpPr>
         <p:spPr>
           <a:xfrm>
-            <a:off x="1042416" y="3108960"/>
+            <a:off x="1042416" y="3035808"/>
             <a:ext cx="2011680" cy="274320"/>
           </a:xfrm>
           <a:prstGeom prst="rect">
@@ -11025,8 +11035,8 @@
         </p:nvSpPr>
         <p:spPr>
           <a:xfrm>
-            <a:off x="1042416" y="3346704"/>
-            <a:ext cx="4449928" cy="384048"/>
+            <a:off x="1042416" y="3273552"/>
+            <a:ext cx="4449928" cy="329184"/>
           </a:xfrm>
           <a:prstGeom prst="rect">
             <a:avLst/>
@@ -11067,7 +11077,7 @@
         </p:nvSpPr>
         <p:spPr>
           <a:xfrm>
-            <a:off x="6699352" y="3108960"/>
+            <a:off x="6699352" y="3035808"/>
             <a:ext cx="2011680" cy="274320"/>
           </a:xfrm>
           <a:prstGeom prst="rect">
@@ -11106,8 +11116,8 @@
         </p:nvSpPr>
         <p:spPr>
           <a:xfrm>
-            <a:off x="6699352" y="3346704"/>
-            <a:ext cx="4449928" cy="384048"/>
+            <a:off x="6699352" y="3273552"/>
+            <a:ext cx="4449928" cy="329184"/>
           </a:xfrm>
           <a:prstGeom prst="rect">
             <a:avLst/>
@@ -11148,7 +11158,7 @@
         </p:nvSpPr>
         <p:spPr>
           <a:xfrm>
-            <a:off x="1042416" y="3712464"/>
+            <a:off x="1042416" y="3566160"/>
             <a:ext cx="4449928" cy="7315"/>
           </a:xfrm>
           <a:prstGeom prst="rect">
@@ -11173,7 +11183,7 @@
         </p:nvSpPr>
         <p:spPr>
           <a:xfrm>
-            <a:off x="6699352" y="3712464"/>
+            <a:off x="6699352" y="3566160"/>
             <a:ext cx="4449928" cy="7315"/>
           </a:xfrm>
           <a:prstGeom prst="rect">
@@ -11198,7 +11208,7 @@
         </p:nvSpPr>
         <p:spPr>
           <a:xfrm>
-            <a:off x="1042416" y="3767328"/>
+            <a:off x="1042416" y="3621024"/>
             <a:ext cx="2011680" cy="274320"/>
           </a:xfrm>
           <a:prstGeom prst="rect">
@@ -11237,8 +11247,8 @@
         </p:nvSpPr>
         <p:spPr>
           <a:xfrm>
-            <a:off x="1042416" y="4005072"/>
-            <a:ext cx="4449928" cy="384048"/>
+            <a:off x="1042416" y="3858768"/>
+            <a:ext cx="4449928" cy="329184"/>
           </a:xfrm>
           <a:prstGeom prst="rect">
             <a:avLst/>
@@ -11279,7 +11289,7 @@
         </p:nvSpPr>
         <p:spPr>
           <a:xfrm>
-            <a:off x="6699352" y="3767328"/>
+            <a:off x="6699352" y="3621024"/>
             <a:ext cx="2011680" cy="274320"/>
           </a:xfrm>
           <a:prstGeom prst="rect">
@@ -11318,8 +11328,8 @@
         </p:nvSpPr>
         <p:spPr>
           <a:xfrm>
-            <a:off x="6699352" y="4005072"/>
-            <a:ext cx="4449928" cy="384048"/>
+            <a:off x="6699352" y="3858768"/>
+            <a:ext cx="4449928" cy="329184"/>
           </a:xfrm>
           <a:prstGeom prst="rect">
             <a:avLst/>
@@ -11360,7 +11370,7 @@
         </p:nvSpPr>
         <p:spPr>
           <a:xfrm>
-            <a:off x="1042416" y="4370832"/>
+            <a:off x="1042416" y="4151376"/>
             <a:ext cx="4449928" cy="7315"/>
           </a:xfrm>
           <a:prstGeom prst="rect">
@@ -11385,7 +11395,7 @@
         </p:nvSpPr>
         <p:spPr>
           <a:xfrm>
-            <a:off x="6699352" y="4370832"/>
+            <a:off x="6699352" y="4151376"/>
             <a:ext cx="4449928" cy="7315"/>
           </a:xfrm>
           <a:prstGeom prst="rect">
@@ -11410,7 +11420,7 @@
         </p:nvSpPr>
         <p:spPr>
           <a:xfrm>
-            <a:off x="1042416" y="4425696"/>
+            <a:off x="1042416" y="4206240"/>
             <a:ext cx="2011680" cy="274320"/>
           </a:xfrm>
           <a:prstGeom prst="rect">
@@ -11449,8 +11459,8 @@
         </p:nvSpPr>
         <p:spPr>
           <a:xfrm>
-            <a:off x="1042416" y="4663440"/>
-            <a:ext cx="4449928" cy="384048"/>
+            <a:off x="1042416" y="4443984"/>
+            <a:ext cx="4449928" cy="329184"/>
           </a:xfrm>
           <a:prstGeom prst="rect">
             <a:avLst/>
@@ -11491,7 +11501,7 @@
         </p:nvSpPr>
         <p:spPr>
           <a:xfrm>
-            <a:off x="6699352" y="4425696"/>
+            <a:off x="6699352" y="4206240"/>
             <a:ext cx="2011680" cy="274320"/>
           </a:xfrm>
           <a:prstGeom prst="rect">
@@ -11530,8 +11540,8 @@
         </p:nvSpPr>
         <p:spPr>
           <a:xfrm>
-            <a:off x="6699352" y="4663440"/>
-            <a:ext cx="4449928" cy="384048"/>
+            <a:off x="6699352" y="4443984"/>
+            <a:ext cx="4449928" cy="329184"/>
           </a:xfrm>
           <a:prstGeom prst="rect">
             <a:avLst/>
@@ -11567,6 +11577,73 @@
       <p:sp>
         <p:nvSpPr>
           <p:cNvPr id="35" name="Shape 33"/>
+          <p:cNvSpPr/>
+          <p:nvPr/>
+        </p:nvSpPr>
+        <p:spPr>
+          <a:xfrm>
+            <a:off x="640080" y="5010912"/>
+            <a:ext cx="10911535" cy="7315"/>
+          </a:xfrm>
+          <a:prstGeom prst="rect">
+            <a:avLst/>
+          </a:prstGeom>
+          <a:solidFill>
+            <a:srgbClr val="111111"/>
+          </a:solidFill>
+          <a:ln w="12700">
+            <a:solidFill>
+              <a:srgbClr val="111111"/>
+            </a:solidFill>
+            <a:prstDash val="solid"/>
+          </a:ln>
+        </p:spPr>
+      </p:sp>
+      <p:sp>
+        <p:nvSpPr>
+          <p:cNvPr id="36" name="Text 34"/>
+          <p:cNvSpPr/>
+          <p:nvPr/>
+        </p:nvSpPr>
+        <p:spPr>
+          <a:xfrm>
+            <a:off x="640080" y="5120640"/>
+            <a:ext cx="10911535" cy="402336"/>
+          </a:xfrm>
+          <a:prstGeom prst="rect">
+            <a:avLst/>
+          </a:prstGeom>
+          <a:noFill/>
+          <a:ln/>
+        </p:spPr>
+        <p:txBody>
+          <a:bodyPr wrap="square" lIns="0" tIns="0" rIns="0" bIns="0" rtlCol="0" anchor="t"/>
+          <a:lstStyle/>
+          <a:p>
+            <a:pPr indent="0" marL="0">
+              <a:lnSpc>
+                <a:spcPct val="120000"/>
+              </a:lnSpc>
+              <a:buNone/>
+            </a:pPr>
+            <a:r>
+              <a:rPr lang="en-US" sz="1300" b="1" dirty="0">
+                <a:solidFill>
+                  <a:srgbClr val="111111"/>
+                </a:solidFill>
+                <a:latin typeface="Pretendard" pitchFamily="34" charset="0"/>
+                <a:ea typeface="Pretendard" pitchFamily="34" charset="-122"/>
+                <a:cs typeface="Pretendard" pitchFamily="34" charset="-120"/>
+              </a:rPr>
+              <a:t>네 가지 중 내 문제에 안 맞는 것이 하나는 있습니다. 어느 것인지 찾고, 그것을 어떻게 다룰지 적는 것이 입장입니다.</a:t>
+            </a:r>
+            <a:endParaRPr lang="en-US" sz="1300" dirty="0"/>
+          </a:p>
+        </p:txBody>
+      </p:sp>
+      <p:sp>
+        <p:nvSpPr>
+          <p:cNvPr id="37" name="Shape 35"/>
           <p:cNvSpPr/>
           <p:nvPr/>
         </p:nvSpPr>
@@ -11591,7 +11668,7 @@
       </p:sp>
       <p:sp>
         <p:nvSpPr>
-          <p:cNvPr id="36" name="Text 34"/>
+          <p:cNvPr id="38" name="Text 36"/>
           <p:cNvSpPr/>
           <p:nvPr/>
         </p:nvSpPr>
@@ -11630,7 +11707,7 @@
       </p:sp>
       <p:sp>
         <p:nvSpPr>
-          <p:cNvPr id="37" name="Text 35"/>
+          <p:cNvPr id="39" name="Text 37"/>
           <p:cNvSpPr/>
           <p:nvPr/>
         </p:nvSpPr>
@@ -13256,7 +13333,7 @@
         <p:spPr>
           <a:xfrm>
             <a:off x="640080" y="1627632"/>
-            <a:ext cx="5254600" cy="4078224"/>
+            <a:ext cx="5254600" cy="3712464"/>
           </a:xfrm>
           <a:prstGeom prst="rect">
             <a:avLst/>
@@ -13320,7 +13397,7 @@
         <p:spPr>
           <a:xfrm>
             <a:off x="6297016" y="1627632"/>
-            <a:ext cx="5254600" cy="4078224"/>
+            <a:ext cx="5254600" cy="3712464"/>
           </a:xfrm>
           <a:prstGeom prst="rect">
             <a:avLst/>
@@ -13423,7 +13500,7 @@
         <p:spPr>
           <a:xfrm>
             <a:off x="1042416" y="2688336"/>
-            <a:ext cx="4449928" cy="384048"/>
+            <a:ext cx="4449928" cy="329184"/>
           </a:xfrm>
           <a:prstGeom prst="rect">
             <a:avLst/>
@@ -13504,7 +13581,7 @@
         <p:spPr>
           <a:xfrm>
             <a:off x="6699352" y="2688336"/>
-            <a:ext cx="4449928" cy="384048"/>
+            <a:ext cx="4449928" cy="329184"/>
           </a:xfrm>
           <a:prstGeom prst="rect">
             <a:avLst/>
@@ -13545,7 +13622,7 @@
         </p:nvSpPr>
         <p:spPr>
           <a:xfrm>
-            <a:off x="1042416" y="3054096"/>
+            <a:off x="1042416" y="2980944"/>
             <a:ext cx="4449928" cy="7315"/>
           </a:xfrm>
           <a:prstGeom prst="rect">
@@ -13570,7 +13647,7 @@
         </p:nvSpPr>
         <p:spPr>
           <a:xfrm>
-            <a:off x="6699352" y="3054096"/>
+            <a:off x="6699352" y="2980944"/>
             <a:ext cx="4449928" cy="7315"/>
           </a:xfrm>
           <a:prstGeom prst="rect">
@@ -13595,7 +13672,7 @@
         </p:nvSpPr>
         <p:spPr>
           <a:xfrm>
-            <a:off x="1042416" y="3108960"/>
+            <a:off x="1042416" y="3035808"/>
             <a:ext cx="2011680" cy="274320"/>
           </a:xfrm>
           <a:prstGeom prst="rect">
@@ -13634,8 +13711,8 @@
         </p:nvSpPr>
         <p:spPr>
           <a:xfrm>
-            <a:off x="1042416" y="3346704"/>
-            <a:ext cx="4449928" cy="384048"/>
+            <a:off x="1042416" y="3273552"/>
+            <a:ext cx="4449928" cy="329184"/>
           </a:xfrm>
           <a:prstGeom prst="rect">
             <a:avLst/>
@@ -13676,7 +13753,7 @@
         </p:nvSpPr>
         <p:spPr>
           <a:xfrm>
-            <a:off x="6699352" y="3108960"/>
+            <a:off x="6699352" y="3035808"/>
             <a:ext cx="2011680" cy="274320"/>
           </a:xfrm>
           <a:prstGeom prst="rect">
@@ -13715,8 +13792,8 @@
         </p:nvSpPr>
         <p:spPr>
           <a:xfrm>
-            <a:off x="6699352" y="3346704"/>
-            <a:ext cx="4449928" cy="384048"/>
+            <a:off x="6699352" y="3273552"/>
+            <a:ext cx="4449928" cy="329184"/>
           </a:xfrm>
           <a:prstGeom prst="rect">
             <a:avLst/>
@@ -13757,7 +13834,7 @@
         </p:nvSpPr>
         <p:spPr>
           <a:xfrm>
-            <a:off x="1042416" y="3712464"/>
+            <a:off x="1042416" y="3566160"/>
             <a:ext cx="4449928" cy="7315"/>
           </a:xfrm>
           <a:prstGeom prst="rect">
@@ -13782,7 +13859,7 @@
         </p:nvSpPr>
         <p:spPr>
           <a:xfrm>
-            <a:off x="6699352" y="3712464"/>
+            <a:off x="6699352" y="3566160"/>
             <a:ext cx="4449928" cy="7315"/>
           </a:xfrm>
           <a:prstGeom prst="rect">
@@ -13807,7 +13884,7 @@
         </p:nvSpPr>
         <p:spPr>
           <a:xfrm>
-            <a:off x="1042416" y="3767328"/>
+            <a:off x="1042416" y="3621024"/>
             <a:ext cx="2011680" cy="274320"/>
           </a:xfrm>
           <a:prstGeom prst="rect">
@@ -13846,8 +13923,8 @@
         </p:nvSpPr>
         <p:spPr>
           <a:xfrm>
-            <a:off x="1042416" y="4005072"/>
-            <a:ext cx="4449928" cy="384048"/>
+            <a:off x="1042416" y="3858768"/>
+            <a:ext cx="4449928" cy="329184"/>
           </a:xfrm>
           <a:prstGeom prst="rect">
             <a:avLst/>
@@ -13888,7 +13965,7 @@
         </p:nvSpPr>
         <p:spPr>
           <a:xfrm>
-            <a:off x="6699352" y="3767328"/>
+            <a:off x="6699352" y="3621024"/>
             <a:ext cx="2011680" cy="274320"/>
           </a:xfrm>
           <a:prstGeom prst="rect">
@@ -13927,8 +14004,8 @@
         </p:nvSpPr>
         <p:spPr>
           <a:xfrm>
-            <a:off x="6699352" y="4005072"/>
-            <a:ext cx="4449928" cy="384048"/>
+            <a:off x="6699352" y="3858768"/>
+            <a:ext cx="4449928" cy="329184"/>
           </a:xfrm>
           <a:prstGeom prst="rect">
             <a:avLst/>
@@ -13969,7 +14046,7 @@
         </p:nvSpPr>
         <p:spPr>
           <a:xfrm>
-            <a:off x="1042416" y="4370832"/>
+            <a:off x="1042416" y="4151376"/>
             <a:ext cx="4449928" cy="7315"/>
           </a:xfrm>
           <a:prstGeom prst="rect">
@@ -13994,7 +14071,7 @@
         </p:nvSpPr>
         <p:spPr>
           <a:xfrm>
-            <a:off x="6699352" y="4370832"/>
+            <a:off x="6699352" y="4151376"/>
             <a:ext cx="4449928" cy="7315"/>
           </a:xfrm>
           <a:prstGeom prst="rect">
@@ -14019,7 +14096,7 @@
         </p:nvSpPr>
         <p:spPr>
           <a:xfrm>
-            <a:off x="1042416" y="4425696"/>
+            <a:off x="1042416" y="4206240"/>
             <a:ext cx="2011680" cy="274320"/>
           </a:xfrm>
           <a:prstGeom prst="rect">
@@ -14058,8 +14135,8 @@
         </p:nvSpPr>
         <p:spPr>
           <a:xfrm>
-            <a:off x="1042416" y="4663440"/>
-            <a:ext cx="4449928" cy="384048"/>
+            <a:off x="1042416" y="4443984"/>
+            <a:ext cx="4449928" cy="329184"/>
           </a:xfrm>
           <a:prstGeom prst="rect">
             <a:avLst/>
@@ -14100,7 +14177,7 @@
         </p:nvSpPr>
         <p:spPr>
           <a:xfrm>
-            <a:off x="6699352" y="4425696"/>
+            <a:off x="6699352" y="4206240"/>
             <a:ext cx="2011680" cy="274320"/>
           </a:xfrm>
           <a:prstGeom prst="rect">
@@ -14139,8 +14216,8 @@
         </p:nvSpPr>
         <p:spPr>
           <a:xfrm>
-            <a:off x="6699352" y="4663440"/>
-            <a:ext cx="4449928" cy="384048"/>
+            <a:off x="6699352" y="4443984"/>
+            <a:ext cx="4449928" cy="329184"/>
           </a:xfrm>
           <a:prstGeom prst="rect">
             <a:avLst/>
@@ -14181,7 +14258,7 @@
         </p:nvSpPr>
         <p:spPr>
           <a:xfrm>
-            <a:off x="1042416" y="5029200"/>
+            <a:off x="1042416" y="4736592"/>
             <a:ext cx="4449928" cy="7315"/>
           </a:xfrm>
           <a:prstGeom prst="rect">
@@ -14206,7 +14283,7 @@
         </p:nvSpPr>
         <p:spPr>
           <a:xfrm>
-            <a:off x="6699352" y="5029200"/>
+            <a:off x="6699352" y="4736592"/>
             <a:ext cx="4449928" cy="7315"/>
           </a:xfrm>
           <a:prstGeom prst="rect">
@@ -14231,7 +14308,7 @@
         </p:nvSpPr>
         <p:spPr>
           <a:xfrm>
-            <a:off x="1042416" y="5084064"/>
+            <a:off x="1042416" y="4791456"/>
             <a:ext cx="2011680" cy="274320"/>
           </a:xfrm>
           <a:prstGeom prst="rect">
@@ -14270,8 +14347,8 @@
         </p:nvSpPr>
         <p:spPr>
           <a:xfrm>
-            <a:off x="1042416" y="5321808"/>
-            <a:ext cx="4449928" cy="384048"/>
+            <a:off x="1042416" y="5029200"/>
+            <a:ext cx="4449928" cy="329184"/>
           </a:xfrm>
           <a:prstGeom prst="rect">
             <a:avLst/>
@@ -14312,7 +14389,7 @@
         </p:nvSpPr>
         <p:spPr>
           <a:xfrm>
-            <a:off x="6699352" y="5084064"/>
+            <a:off x="6699352" y="4791456"/>
             <a:ext cx="2011680" cy="274320"/>
           </a:xfrm>
           <a:prstGeom prst="rect">
@@ -14351,8 +14428,8 @@
         </p:nvSpPr>
         <p:spPr>
           <a:xfrm>
-            <a:off x="6699352" y="5321808"/>
-            <a:ext cx="4449928" cy="384048"/>
+            <a:off x="6699352" y="5029200"/>
+            <a:ext cx="4449928" cy="329184"/>
           </a:xfrm>
           <a:prstGeom prst="rect">
             <a:avLst/>
@@ -14388,6 +14465,73 @@
       <p:sp>
         <p:nvSpPr>
           <p:cNvPr id="41" name="Shape 39"/>
+          <p:cNvSpPr/>
+          <p:nvPr/>
+        </p:nvSpPr>
+        <p:spPr>
+          <a:xfrm>
+            <a:off x="640080" y="5596128"/>
+            <a:ext cx="10911535" cy="7315"/>
+          </a:xfrm>
+          <a:prstGeom prst="rect">
+            <a:avLst/>
+          </a:prstGeom>
+          <a:solidFill>
+            <a:srgbClr val="111111"/>
+          </a:solidFill>
+          <a:ln w="12700">
+            <a:solidFill>
+              <a:srgbClr val="111111"/>
+            </a:solidFill>
+            <a:prstDash val="solid"/>
+          </a:ln>
+        </p:spPr>
+      </p:sp>
+      <p:sp>
+        <p:nvSpPr>
+          <p:cNvPr id="42" name="Text 40"/>
+          <p:cNvSpPr/>
+          <p:nvPr/>
+        </p:nvSpPr>
+        <p:spPr>
+          <a:xfrm>
+            <a:off x="640080" y="5705856"/>
+            <a:ext cx="10911535" cy="402336"/>
+          </a:xfrm>
+          <a:prstGeom prst="rect">
+            <a:avLst/>
+          </a:prstGeom>
+          <a:noFill/>
+          <a:ln/>
+        </p:spPr>
+        <p:txBody>
+          <a:bodyPr wrap="square" lIns="0" tIns="0" rIns="0" bIns="0" rtlCol="0" anchor="t"/>
+          <a:lstStyle/>
+          <a:p>
+            <a:pPr indent="0" marL="0">
+              <a:lnSpc>
+                <a:spcPct val="120000"/>
+              </a:lnSpc>
+              <a:buNone/>
+            </a:pPr>
+            <a:r>
+              <a:rPr lang="en-US" sz="1300" b="1" dirty="0">
+                <a:solidFill>
+                  <a:srgbClr val="111111"/>
+                </a:solidFill>
+                <a:latin typeface="Pretendard" pitchFamily="34" charset="0"/>
+                <a:ea typeface="Pretendard" pitchFamily="34" charset="-122"/>
+                <a:cs typeface="Pretendard" pitchFamily="34" charset="-120"/>
+              </a:rPr>
+              <a:t>한 절로 쓰면 그 절에서 끝나고, 뼈대로 쓰면 글 전체가 서 있습니다.</a:t>
+            </a:r>
+            <a:endParaRPr lang="en-US" sz="1300" dirty="0"/>
+          </a:p>
+        </p:txBody>
+      </p:sp>
+      <p:sp>
+        <p:nvSpPr>
+          <p:cNvPr id="43" name="Shape 41"/>
           <p:cNvSpPr/>
           <p:nvPr/>
         </p:nvSpPr>
@@ -14412,7 +14556,7 @@
       </p:sp>
       <p:sp>
         <p:nvSpPr>
-          <p:cNvPr id="42" name="Text 40"/>
+          <p:cNvPr id="44" name="Text 42"/>
           <p:cNvSpPr/>
           <p:nvPr/>
         </p:nvSpPr>
@@ -14451,7 +14595,7 @@
       </p:sp>
       <p:sp>
         <p:nvSpPr>
-          <p:cNvPr id="43" name="Text 41"/>
+          <p:cNvPr id="45" name="Text 43"/>
           <p:cNvSpPr/>
           <p:nvPr/>
         </p:nvSpPr>
